--- a/docs/result/presentation.pptx
+++ b/docs/result/presentation.pptx
@@ -2007,7 +2007,7 @@
                 <a:ea typeface="Cambria" pitchFamily="34" charset="-122"/>
                 <a:cs typeface="Cambria" pitchFamily="34" charset="-120"/>
               </a:rPr>
-              <a:t>$211</a:t>
+              <a:t>$216</a:t>
             </a:r>
             <a:endParaRPr lang="en-US" sz="3200" dirty="0"/>
           </a:p>
@@ -2109,7 +2109,7 @@
                 <a:ea typeface="Cambria" pitchFamily="34" charset="-122"/>
                 <a:cs typeface="Cambria" pitchFamily="34" charset="-120"/>
               </a:rPr>
-              <a:t>$289</a:t>
+              <a:t>$284</a:t>
             </a:r>
             <a:endParaRPr lang="en-US" sz="3200" dirty="0"/>
           </a:p>
@@ -2211,7 +2211,7 @@
                 <a:ea typeface="Cambria" pitchFamily="34" charset="-122"/>
                 <a:cs typeface="Cambria" pitchFamily="34" charset="-120"/>
               </a:rPr>
-              <a:t>$12.5</a:t>
+              <a:t>$16.5</a:t>
             </a:r>
             <a:endParaRPr lang="en-US" sz="3200" dirty="0"/>
           </a:p>
@@ -4559,7 +4559,7 @@
                   <a:schemeClr val="tx2"/>
                 </a:solidFill>
               </a:rPr>
-              <a:t>Bimodal, as predicted without continuous difficulty control. Reused copies are not independent generations.</a:t>
+              <a:t>Bimodal, as predicted. Reused copies are not independent generations. Historical candidate records, not approvals - none survives the audit.</a:t>
             </a:r>
             <a:endParaRPr lang="en-US" sz="1500" dirty="0"/>
           </a:p>
@@ -4913,6 +4913,24 @@
                 </a:solidFill>
               </a:rPr>
               <a:t>Turn-cap exhaustion is invalid — even when the verifier reward is 1.</a:t>
+            </a:r>
+            <a:endParaRPr lang="en-US" sz="1700" dirty="0"/>
+          </a:p>
+          <a:p>
+            <a:pPr marL="342900" indent="-342900">
+              <a:spcAft>
+                <a:spcPts val="1000"/>
+              </a:spcAft>
+              <a:buSzPct val="100000"/>
+              <a:buChar char="•"/>
+            </a:pPr>
+            <a:r>
+              <a:rPr lang="en-US" sz="1700" dirty="0">
+                <a:solidFill>
+                  <a:schemeClr val="tx1"/>
+                </a:solidFill>
+              </a:rPr>
+              <a:t>Result: all four earlier 'shipped' tasks failed this audit, so output/ is empty on purpose.</a:t>
             </a:r>
             <a:endParaRPr lang="en-US" sz="1700" dirty="0"/>
           </a:p>

--- a/docs/result/presentation.pptx
+++ b/docs/result/presentation.pptx
@@ -4930,7 +4930,7 @@
                   <a:schemeClr val="tx1"/>
                 </a:solidFill>
               </a:rPr>
-              <a:t>Result: all four earlier 'shipped' tasks failed this audit, so output/ is empty on purpose.</a:t>
+              <a:t>output/ holds 5 audited packages; none is approved because none lands in the 1-3/5 band.</a:t>
             </a:r>
             <a:endParaRPr lang="en-US" sz="1700" dirty="0"/>
           </a:p>

--- a/docs/result/presentation.pptx
+++ b/docs/result/presentation.pptx
@@ -2007,7 +2007,7 @@
                 <a:ea typeface="Cambria" pitchFamily="34" charset="-122"/>
                 <a:cs typeface="Cambria" pitchFamily="34" charset="-120"/>
               </a:rPr>
-              <a:t>$216</a:t>
+              <a:t>$220</a:t>
             </a:r>
             <a:endParaRPr lang="en-US" sz="3200" dirty="0"/>
           </a:p>
@@ -2109,7 +2109,7 @@
                 <a:ea typeface="Cambria" pitchFamily="34" charset="-122"/>
                 <a:cs typeface="Cambria" pitchFamily="34" charset="-120"/>
               </a:rPr>
-              <a:t>$284</a:t>
+              <a:t>$280</a:t>
             </a:r>
             <a:endParaRPr lang="en-US" sz="3200" dirty="0"/>
           </a:p>
@@ -4559,7 +4559,7 @@
                   <a:schemeClr val="tx2"/>
                 </a:solidFill>
               </a:rPr>
-              <a:t>Bimodal, as predicted. Reused copies are not independent generations. Historical candidate records, not approvals - none survives the audit.</a:t>
+              <a:t>Bimodal, as predicted. Historical candidate records, not approvals - most sit outside the 1-3/5 band.</a:t>
             </a:r>
             <a:endParaRPr lang="en-US" sz="1500" dirty="0"/>
           </a:p>
@@ -4930,7 +4930,7 @@
                   <a:schemeClr val="tx1"/>
                 </a:solidFill>
               </a:rPr>
-              <a:t>output/ holds 5 audited packages; none is approved because none lands in the 1-3/5 band.</a:t>
+              <a:t>Approved: optimize-policy-decision-audit, 3/5 honest passes, pooled 7/10 = 0.70 over two batches.</a:t>
             </a:r>
             <a:endParaRPr lang="en-US" sz="1700" dirty="0"/>
           </a:p>

--- a/docs/result/presentation.pptx
+++ b/docs/result/presentation.pptx
@@ -5224,7 +5224,7 @@
                             <a:srgbClr val="0F1B2A"/>
                           </a:solidFill>
                         </a:rPr>
-                        <a:t>curtailment lossless; ~12-23% trials saved; dollar figure caveated</a:t>
+                        <a:t>26.5% of trials (~$3.79) saved vs naive 5x; invalid-run early stops credited with nothing</a:t>
                       </a:r>
                       <a:endParaRPr lang="en-US" sz="1400" dirty="0"/>
                     </a:p>
@@ -5342,7 +5342,7 @@
                             <a:srgbClr val="0F1B2A"/>
                           </a:solidFill>
                         </a:rPr>
-                        <a:t>implemented and exercised; no in-band movement demonstrated</a:t>
+                        <a:t>13 hash-bound tuning experiments; 0 moved into the band — not demonstrated</a:t>
                       </a:r>
                       <a:endParaRPr lang="en-US" sz="1400" dirty="0"/>
                     </a:p>
@@ -5460,7 +5460,7 @@
                             <a:srgbClr val="0F1B2A"/>
                           </a:solidFill>
                         </a:rPr>
-                        <a:t>coverage + novelty reported on the TB 2.1 pool</a:t>
+                        <a:t>coverage, duplication and novelty provenance reported on the TB 2.1 pool (89 tasks)</a:t>
                       </a:r>
                       <a:endParaRPr lang="en-US" sz="1400" dirty="0"/>
                     </a:p>
@@ -5578,7 +5578,7 @@
                             <a:srgbClr val="0F1B2A"/>
                           </a:solidFill>
                         </a:rPr>
-                        <a:t>blind accuracy 0.38 (95% CI 0.21-0.57)</a:t>
+                        <a:t>blind accuracy 0.38 (95% CI 0.21-0.57); rubric overfits our generator (examples 0/6 vs generated 3/4)</a:t>
                       </a:r>
                       <a:endParaRPr lang="en-US" sz="1400" dirty="0"/>
                     </a:p>

--- a/docs/result/presentation.pptx
+++ b/docs/result/presentation.pptx
@@ -1128,7 +1128,7 @@
           <a:p>
             <a:r>
               <a:rPr lang="en-US" dirty="0"/>
-              <a:t>22 records: 12 fresh, 10 recalibrated copies. Three landed in band for this solver.</a:t>
+              <a:t>Be careful here: these are the historical candidate records, not approvals. The ledger shows three candidates labelled learnable, but after the audit only ONE task is approved - the other two were re-measured and fell outside the band. Slide 8 has the audited number.</a:t>
             </a:r>
             <a:endParaRPr lang="en-US" dirty="0"/>
           </a:p>
@@ -1392,7 +1392,7 @@
           <a:p>
             <a:r>
               <a:rPr lang="en-US" dirty="0"/>
-              <a:t>Two goals solid, one exercised with a negative result, one partial — reported honestly.</a:t>
+              <a:t>A and C are solid; B is a measured negative (13 tuning experiments, none reached the band); D is partial, and note the rubric-overfitting caveat - it passes 3 of our packages and 0 of 6 human-written reference tasks, so never quote it as general task quality.</a:t>
             </a:r>
             <a:endParaRPr lang="en-US" dirty="0"/>
           </a:p>

--- a/docs/result/presentation.pptx
+++ b/docs/result/presentation.pptx
@@ -15,9 +15,11 @@
     <p:sldId id="263" r:id="rId9"/>
     <p:sldId id="264" r:id="rId10"/>
     <p:sldId id="265" r:id="rId11"/>
+    <p:sldId id="266" r:id="rId12"/>
+    <p:sldId id="267" r:id="rId13"/>
   </p:sldIdLst>
   <p:notesMasterIdLst>
-    <p:notesMasterId r:id="rId12"/>
+    <p:notesMasterId r:id="rId14"/>
   </p:notesMasterIdLst>
   <p:sldSz cx="9144000" cy="5143500"/>
   <p:notesSz cx="5143500" cy="9144000"/>
@@ -124,6 +126,173 @@
     <c:autoTitleDeleted val="1"/>
     <c:plotArea>
       <c:layout/>
+      <c:barChart>
+        <c:barDir val="col"/>
+        <c:grouping val="clustered"/>
+        <c:varyColors val="0"/>
+        <c:ser>
+          <c:idx val="0"/>
+          <c:order val="0"/>
+          <c:tx>
+            <c:strRef>
+              <c:f>Sheet1!$B$1</c:f>
+              <c:strCache>
+                <c:ptCount val="1"/>
+                <c:pt idx="0">
+                  <c:v>Candidates</c:v>
+                </c:pt>
+              </c:strCache>
+            </c:strRef>
+          </c:tx>
+          <c:spPr>
+            <a:solidFill>
+              <a:srgbClr val="2A9D8F"/>
+            </a:solidFill>
+            <a:effectLst/>
+          </c:spPr>
+          <c:invertIfNegative val="0"/>
+          <c:dLbls>
+            <c:numFmt formatCode="#,##0" sourceLinked="0"/>
+            <c:txPr>
+              <a:bodyPr/>
+              <a:lstStyle/>
+              <a:p>
+                <a:pPr>
+                  <a:defRPr b="0" i="0" strike="noStrike" sz="1200" u="none">
+                    <a:solidFill>
+                      <a:srgbClr val="0F1B2A"/>
+                    </a:solidFill>
+                    <a:latin typeface="Calibri"/>
+                  </a:defRPr>
+                </a:pPr>
+              </a:p>
+            </c:txPr>
+            <c:showLegendKey val="0"/>
+            <c:showVal val="1"/>
+            <c:showCatName val="0"/>
+            <c:showSerName val="0"/>
+            <c:showPercent val="0"/>
+            <c:showBubbleSize val="0"/>
+            <c:showLeaderLines val="0"/>
+          </c:dLbls>
+          <c:dPt>
+            <c:idx val="0"/>
+            <c:invertIfNegative val="0"/>
+            <c:bubble3D val="0"/>
+            <c:spPr>
+              <a:solidFill>
+                <a:srgbClr val="2A9D8F"/>
+              </a:solidFill>
+              <a:effectLst/>
+            </c:spPr>
+          </c:dPt>
+          <c:dPt>
+            <c:idx val="1"/>
+            <c:invertIfNegative val="0"/>
+            <c:bubble3D val="0"/>
+            <c:spPr>
+              <a:solidFill>
+                <a:srgbClr val="E9C46A"/>
+              </a:solidFill>
+              <a:effectLst/>
+            </c:spPr>
+          </c:dPt>
+          <c:dPt>
+            <c:idx val="2"/>
+            <c:invertIfNegative val="0"/>
+            <c:bubble3D val="0"/>
+            <c:spPr>
+              <a:solidFill>
+                <a:srgbClr val="C0392B"/>
+              </a:solidFill>
+              <a:effectLst/>
+            </c:spPr>
+          </c:dPt>
+          <c:dPt>
+            <c:idx val="3"/>
+            <c:invertIfNegative val="0"/>
+            <c:bubble3D val="0"/>
+            <c:spPr>
+              <a:solidFill>
+                <a:srgbClr val="7A8B99"/>
+              </a:solidFill>
+              <a:effectLst/>
+            </c:spPr>
+          </c:dPt>
+          <c:cat>
+            <c:multiLvlStrRef>
+              <c:f>Sheet1!$A$2:$A$5</c:f>
+              <c:multiLvlStrCache>
+                <c:ptCount val="4"/>
+                <c:lvl>
+                  <c:pt idx="0">
+                    <c:v>Learnable (label)</c:v>
+                  </c:pt>
+                  <c:pt idx="1">
+                    <c:v>Too easy</c:v>
+                  </c:pt>
+                  <c:pt idx="2">
+                    <c:v>Too hard</c:v>
+                  </c:pt>
+                  <c:pt idx="3">
+                    <c:v>Invalid</c:v>
+                  </c:pt>
+                </c:lvl>
+              </c:multiLvlStrCache>
+            </c:multiLvlStrRef>
+          </c:cat>
+          <c:val>
+            <c:numRef>
+              <c:f>Sheet1!$B$2:$B$5</c:f>
+              <c:numCache>
+                <c:formatCode>General</c:formatCode>
+                <c:ptCount val="4"/>
+                <c:pt idx="0">
+                  <c:v>3</c:v>
+                </c:pt>
+                <c:pt idx="1">
+                  <c:v>1</c:v>
+                </c:pt>
+                <c:pt idx="2">
+                  <c:v>6</c:v>
+                </c:pt>
+                <c:pt idx="3">
+                  <c:v>7</c:v>
+                </c:pt>
+              </c:numCache>
+            </c:numRef>
+          </c:val>
+        </c:ser>
+        <c:dLbls>
+          <c:numFmt formatCode="#,##0" sourceLinked="0"/>
+          <c:txPr>
+            <a:bodyPr/>
+            <a:lstStyle/>
+            <a:p>
+              <a:pPr>
+                <a:defRPr b="0" i="0" strike="noStrike" sz="1200" u="none">
+                  <a:solidFill>
+                    <a:srgbClr val="0F1B2A"/>
+                  </a:solidFill>
+                  <a:latin typeface="Calibri"/>
+                </a:defRPr>
+              </a:pPr>
+            </a:p>
+          </c:txPr>
+          <c:showLegendKey val="0"/>
+          <c:showVal val="1"/>
+          <c:showCatName val="0"/>
+          <c:showSerName val="0"/>
+          <c:showPercent val="0"/>
+          <c:showBubbleSize val="0"/>
+          <c:showLeaderLines val="0"/>
+        </c:dLbls>
+        <c:gapWidth val="150"/>
+        <c:overlap val="0"/>
+        <c:axId val="2094734554"/>
+        <c:axId val="2094734552"/>
+        <c:axId val="2094734556"/>
+      </c:barChart>
       <c:catAx>
         <c:axId val="2094734554"/>
         <c:scaling>
@@ -764,6 +933,182 @@
 </p:notes>
 </file>
 
+<file path=ppt/notesSlides/notesSlide11.xml><?xml version="1.0" encoding="utf-8"?>
+<p:notes xmlns:a="http://schemas.openxmlformats.org/drawingml/2006/main" xmlns:r="http://schemas.openxmlformats.org/officeDocument/2006/relationships" xmlns:p="http://schemas.openxmlformats.org/presentationml/2006/main">
+  <p:cSld>
+    <p:spTree>
+      <p:nvGrpSpPr>
+        <p:cNvPr id="1" name=""/>
+        <p:cNvGrpSpPr/>
+        <p:nvPr/>
+      </p:nvGrpSpPr>
+      <p:grpSpPr>
+        <a:xfrm>
+          <a:off x="0" y="0"/>
+          <a:ext cx="0" cy="0"/>
+          <a:chOff x="0" y="0"/>
+          <a:chExt cx="0" cy="0"/>
+        </a:xfrm>
+      </p:grpSpPr>
+      <p:sp>
+        <p:nvSpPr>
+          <p:cNvPr id="2" name="Slide Image Placeholder 1"/>
+          <p:cNvSpPr>
+            <a:spLocks noGrp="1" noRot="1" noChangeAspect="1"/>
+          </p:cNvSpPr>
+          <p:nvPr>
+            <p:ph type="sldImg"/>
+          </p:nvPr>
+        </p:nvSpPr>
+        <p:spPr/>
+      </p:sp>
+      <p:sp>
+        <p:nvSpPr>
+          <p:cNvPr id="3" name="Notes Placeholder 2"/>
+          <p:cNvSpPr>
+            <a:spLocks noGrp="1"/>
+          </p:cNvSpPr>
+          <p:nvPr>
+            <p:ph type="body" idx="1"/>
+          </p:nvPr>
+        </p:nvSpPr>
+        <p:spPr/>
+        <p:txBody>
+          <a:bodyPr/>
+          <a:lstStyle/>
+          <a:p>
+            <a:r>
+              <a:rPr lang="en-US" dirty="0"/>
+              <a:t>Two ideas carry the architecture. First, money only moves after the cheap gates pass, which is why one calibration trial costs about nine cents. Second, difficulty is built into the verifier - hidden-seed inputs at verify time, multi-stage dependent work - and never into a stated wall-clock budget, because that failure mode is environment-dependent and the rubric rejects it.</a:t>
+            </a:r>
+            <a:endParaRPr lang="en-US" dirty="0"/>
+          </a:p>
+        </p:txBody>
+      </p:sp>
+      <p:sp>
+        <p:nvSpPr>
+          <p:cNvPr id="4" name="Slide Number Placeholder 3"/>
+          <p:cNvSpPr>
+            <a:spLocks noGrp="1"/>
+          </p:cNvSpPr>
+          <p:nvPr>
+            <p:ph type="sldNum" sz="quarter" idx="10"/>
+          </p:nvPr>
+        </p:nvSpPr>
+        <p:spPr/>
+        <p:txBody>
+          <a:bodyPr/>
+          <a:lstStyle/>
+          <a:p>
+            <a:fld id="{F7021451-1387-4CA6-816F-3879F97B5CBC}" type="slidenum">
+              <a:rPr lang="en-US"/>
+              <a:t>11</a:t>
+            </a:fld>
+            <a:endParaRPr lang="en-US"/>
+          </a:p>
+        </p:txBody>
+      </p:sp>
+    </p:spTree>
+    <p:extLst>
+      <p:ext uri="{BB962C8B-B14F-4D97-AF65-F5344CB8AC3E}">
+        <p14:creationId xmlns:p14="http://schemas.microsoft.com/office/powerpoint/2010/main" val="1024086991"/>
+      </p:ext>
+    </p:extLst>
+  </p:cSld>
+  <p:clrMapOvr>
+    <a:masterClrMapping/>
+  </p:clrMapOvr>
+</p:notes>
+</file>
+
+<file path=ppt/notesSlides/notesSlide12.xml><?xml version="1.0" encoding="utf-8"?>
+<p:notes xmlns:a="http://schemas.openxmlformats.org/drawingml/2006/main" xmlns:r="http://schemas.openxmlformats.org/officeDocument/2006/relationships" xmlns:p="http://schemas.openxmlformats.org/presentationml/2006/main">
+  <p:cSld>
+    <p:spTree>
+      <p:nvGrpSpPr>
+        <p:cNvPr id="1" name=""/>
+        <p:cNvGrpSpPr/>
+        <p:nvPr/>
+      </p:nvGrpSpPr>
+      <p:grpSpPr>
+        <a:xfrm>
+          <a:off x="0" y="0"/>
+          <a:ext cx="0" cy="0"/>
+          <a:chOff x="0" y="0"/>
+          <a:chExt cx="0" cy="0"/>
+        </a:xfrm>
+      </p:grpSpPr>
+      <p:sp>
+        <p:nvSpPr>
+          <p:cNvPr id="2" name="Slide Image Placeholder 1"/>
+          <p:cNvSpPr>
+            <a:spLocks noGrp="1" noRot="1" noChangeAspect="1"/>
+          </p:cNvSpPr>
+          <p:nvPr>
+            <p:ph type="sldImg"/>
+          </p:nvPr>
+        </p:nvSpPr>
+        <p:spPr/>
+      </p:sp>
+      <p:sp>
+        <p:nvSpPr>
+          <p:cNvPr id="3" name="Notes Placeholder 2"/>
+          <p:cNvSpPr>
+            <a:spLocks noGrp="1"/>
+          </p:cNvSpPr>
+          <p:nvPr>
+            <p:ph type="body" idx="1"/>
+          </p:nvPr>
+        </p:nvSpPr>
+        <p:spPr/>
+        <p:txBody>
+          <a:bodyPr/>
+          <a:lstStyle/>
+          <a:p>
+            <a:r>
+              <a:rPr lang="en-US" dirty="0"/>
+              <a:t>If asked about the band being arbitrary: the 1-3 of 5 rule is a wide window, and the response is the pre-registered pooling rule plus two independent batches, not a claim that 3/5 is a precise measurement. If asked about author strength: the study is the honest negative result - no cell produced an in-band task, so 'use a better author' is not supported by our data.</a:t>
+            </a:r>
+            <a:endParaRPr lang="en-US" dirty="0"/>
+          </a:p>
+        </p:txBody>
+      </p:sp>
+      <p:sp>
+        <p:nvSpPr>
+          <p:cNvPr id="4" name="Slide Number Placeholder 3"/>
+          <p:cNvSpPr>
+            <a:spLocks noGrp="1"/>
+          </p:cNvSpPr>
+          <p:nvPr>
+            <p:ph type="sldNum" sz="quarter" idx="10"/>
+          </p:nvPr>
+        </p:nvSpPr>
+        <p:spPr/>
+        <p:txBody>
+          <a:bodyPr/>
+          <a:lstStyle/>
+          <a:p>
+            <a:fld id="{F7021451-1387-4CA6-816F-3879F97B5CBC}" type="slidenum">
+              <a:rPr lang="en-US"/>
+              <a:t>12</a:t>
+            </a:fld>
+            <a:endParaRPr lang="en-US"/>
+          </a:p>
+        </p:txBody>
+      </p:sp>
+    </p:spTree>
+    <p:extLst>
+      <p:ext uri="{BB962C8B-B14F-4D97-AF65-F5344CB8AC3E}">
+        <p14:creationId xmlns:p14="http://schemas.microsoft.com/office/powerpoint/2010/main" val="1024086991"/>
+      </p:ext>
+    </p:extLst>
+  </p:cSld>
+  <p:clrMapOvr>
+    <a:masterClrMapping/>
+  </p:clrMapOvr>
+</p:notes>
+</file>
+
 <file path=ppt/notesSlides/notesSlide2.xml><?xml version="1.0" encoding="utf-8"?>
 <p:notes xmlns:a="http://schemas.openxmlformats.org/drawingml/2006/main" xmlns:r="http://schemas.openxmlformats.org/officeDocument/2006/relationships" xmlns:p="http://schemas.openxmlformats.org/presentationml/2006/main">
   <p:cSld>
@@ -1074,7 +1419,7 @@
           <a:p>
             <a:r>
               <a:rPr lang="en-US" dirty="0"/>
-              <a:t>Be careful: these are historical candidate records, not approvals. The ledger shows three labelled learnable; after the audit only ONE task is approved. Slide 7 has the audited number.</a:t>
+              <a:t>Be careful: these are historical candidate records, not approvals. The ledger labels THREE candidates learnable, but re-deriving the distribution under the approval standard gives only TWO: one label rests on a curtailed 1/3, which is not a full 1-3/5 statement, and one full record ends in pipeline status failed. Neither is the approved task, which needed a repair and a second independent batch. After the audit ONE task is approved. Slide 7 has the audited number.</a:t>
             </a:r>
             <a:endParaRPr lang="en-US" dirty="0"/>
           </a:p>
@@ -2334,6 +2679,1027 @@
 </p:sld>
 </file>
 
+<file path=ppt/slides/slide11.xml><?xml version="1.0" encoding="utf-8"?>
+<p:sld xmlns:a="http://schemas.openxmlformats.org/drawingml/2006/main" xmlns:r="http://schemas.openxmlformats.org/officeDocument/2006/relationships" xmlns:p="http://schemas.openxmlformats.org/presentationml/2006/main">
+  <p:cSld name="Slide 11">
+    <p:bg>
+      <p:bgPr>
+        <a:solidFill>
+          <a:srgbClr val="0F1B2A"/>
+        </a:solidFill>
+      </p:bgPr>
+    </p:bg>
+    <p:spTree>
+      <p:nvGrpSpPr>
+        <p:cNvPr id="1" name=""/>
+        <p:cNvGrpSpPr/>
+        <p:nvPr/>
+      </p:nvGrpSpPr>
+      <p:grpSpPr>
+        <a:xfrm>
+          <a:off x="0" y="0"/>
+          <a:ext cx="0" cy="0"/>
+          <a:chOff x="0" y="0"/>
+          <a:chExt cx="0" cy="0"/>
+        </a:xfrm>
+      </p:grpSpPr>
+      <p:sp>
+        <p:nvSpPr>
+          <p:cNvPr id="2" name="Text 0"/>
+          <p:cNvSpPr txBox="1"/>
+          <p:nvPr/>
+        </p:nvSpPr>
+        <p:spPr>
+          <a:xfrm>
+            <a:off x="548640" y="365760"/>
+            <a:ext cx="8046720" cy="640080"/>
+          </a:xfrm>
+          <a:prstGeom prst="rect">
+            <a:avLst/>
+          </a:prstGeom>
+          <a:noFill/>
+          <a:ln/>
+        </p:spPr>
+        <p:txBody>
+          <a:bodyPr wrap="square" lIns="0" tIns="0" rIns="0" bIns="0" rtlCol="0" anchor="ctr"/>
+          <a:lstStyle/>
+          <a:p>
+            <a:pPr indent="0" marL="0">
+              <a:buNone/>
+            </a:pPr>
+            <a:r>
+              <a:rPr lang="en-US" sz="2800" b="1" dirty="0">
+                <a:solidFill>
+                  <a:srgbClr val="FFFFFF"/>
+                </a:solidFill>
+                <a:latin typeface="Cambria" pitchFamily="34" charset="0"/>
+                <a:ea typeface="Cambria" pitchFamily="34" charset="-122"/>
+                <a:cs typeface="Cambria" pitchFamily="34" charset="-120"/>
+              </a:rPr>
+              <a:t>Architecture at a glance</a:t>
+            </a:r>
+            <a:endParaRPr lang="en-US" sz="2800" dirty="0"/>
+          </a:p>
+        </p:txBody>
+      </p:sp>
+      <p:sp>
+        <p:nvSpPr>
+          <p:cNvPr id="3" name="Text 1"/>
+          <p:cNvSpPr txBox="1"/>
+          <p:nvPr/>
+        </p:nvSpPr>
+        <p:spPr>
+          <a:xfrm>
+            <a:off x="548640" y="987552"/>
+            <a:ext cx="8046720" cy="411480"/>
+          </a:xfrm>
+          <a:prstGeom prst="rect">
+            <a:avLst/>
+          </a:prstGeom>
+          <a:noFill/>
+          <a:ln/>
+        </p:spPr>
+        <p:txBody>
+          <a:bodyPr wrap="square" lIns="0" tIns="0" rIns="0" bIns="0" rtlCol="0" anchor="ctr"/>
+          <a:lstStyle/>
+          <a:p>
+            <a:pPr indent="0" marL="0">
+              <a:buNone/>
+            </a:pPr>
+            <a:r>
+              <a:rPr lang="en-US" sz="1500" dirty="0">
+                <a:solidFill>
+                  <a:srgbClr val="2A9D8F"/>
+                </a:solidFill>
+                <a:latin typeface="Calibri" pitchFamily="34" charset="0"/>
+                <a:ea typeface="Calibri" pitchFamily="34" charset="-122"/>
+                <a:cs typeface="Calibri" pitchFamily="34" charset="-120"/>
+              </a:rPr>
+              <a:t>spec → blueprint → author in a container → gates → calibration → ship</a:t>
+            </a:r>
+            <a:endParaRPr lang="en-US" sz="1500" dirty="0"/>
+          </a:p>
+        </p:txBody>
+      </p:sp>
+      <p:sp>
+        <p:nvSpPr>
+          <p:cNvPr id="4" name="Shape 2"/>
+          <p:cNvSpPr/>
+          <p:nvPr/>
+        </p:nvSpPr>
+        <p:spPr>
+          <a:xfrm>
+            <a:off x="548640" y="1600200"/>
+            <a:ext cx="3886200" cy="1417320"/>
+          </a:xfrm>
+          <a:prstGeom prst="roundRect">
+            <a:avLst>
+              <a:gd name="adj" fmla="val 5161"/>
+            </a:avLst>
+          </a:prstGeom>
+          <a:solidFill>
+            <a:srgbClr val="F3F7F6"/>
+          </a:solidFill>
+          <a:ln w="12700">
+            <a:solidFill>
+              <a:srgbClr val="F3F7F6"/>
+            </a:solidFill>
+            <a:prstDash val="solid"/>
+          </a:ln>
+        </p:spPr>
+      </p:sp>
+      <p:sp>
+        <p:nvSpPr>
+          <p:cNvPr id="5" name="Text 3"/>
+          <p:cNvSpPr txBox="1"/>
+          <p:nvPr/>
+        </p:nvSpPr>
+        <p:spPr>
+          <a:xfrm>
+            <a:off x="731520" y="1709928"/>
+            <a:ext cx="3520440" cy="320040"/>
+          </a:xfrm>
+          <a:prstGeom prst="rect">
+            <a:avLst/>
+          </a:prstGeom>
+          <a:noFill/>
+          <a:ln/>
+        </p:spPr>
+        <p:txBody>
+          <a:bodyPr wrap="square" lIns="0" tIns="0" rIns="0" bIns="0" rtlCol="0" anchor="ctr"/>
+          <a:lstStyle/>
+          <a:p>
+            <a:pPr indent="0" marL="0">
+              <a:buNone/>
+            </a:pPr>
+            <a:r>
+              <a:rPr lang="en-US" sz="1500" b="1" dirty="0">
+                <a:solidFill>
+                  <a:srgbClr val="2A9D8F"/>
+                </a:solidFill>
+                <a:latin typeface="Calibri" pitchFamily="34" charset="0"/>
+                <a:ea typeface="Calibri" pitchFamily="34" charset="-122"/>
+                <a:cs typeface="Calibri" pitchFamily="34" charset="-120"/>
+              </a:rPr>
+              <a:t>Gates before money</a:t>
+            </a:r>
+            <a:endParaRPr lang="en-US" sz="1500" dirty="0"/>
+          </a:p>
+        </p:txBody>
+      </p:sp>
+      <p:sp>
+        <p:nvSpPr>
+          <p:cNvPr id="6" name="Text 4"/>
+          <p:cNvSpPr txBox="1"/>
+          <p:nvPr/>
+        </p:nvSpPr>
+        <p:spPr>
+          <a:xfrm>
+            <a:off x="731520" y="2057400"/>
+            <a:ext cx="3520440" cy="868680"/>
+          </a:xfrm>
+          <a:prstGeom prst="rect">
+            <a:avLst/>
+          </a:prstGeom>
+          <a:noFill/>
+          <a:ln/>
+        </p:spPr>
+        <p:txBody>
+          <a:bodyPr wrap="square" lIns="0" tIns="0" rIns="0" bIns="0" rtlCol="0" anchor="ctr"/>
+          <a:lstStyle/>
+          <a:p>
+            <a:pPr indent="0" marL="0">
+              <a:buNone/>
+            </a:pPr>
+            <a:r>
+              <a:rPr lang="en-US" sz="1300" dirty="0">
+                <a:solidFill>
+                  <a:srgbClr val="5A6B7A"/>
+                </a:solidFill>
+                <a:latin typeface="Calibri" pitchFamily="34" charset="0"/>
+                <a:ea typeface="Calibri" pitchFamily="34" charset="-122"/>
+                <a:cs typeface="Calibri" pitchFamily="34" charset="-120"/>
+              </a:rPr>
+              <a:t>structure → oracle/nop → quality; cheap flags stop a run before calibration spend</a:t>
+            </a:r>
+            <a:endParaRPr lang="en-US" sz="1300" dirty="0"/>
+          </a:p>
+        </p:txBody>
+      </p:sp>
+      <p:sp>
+        <p:nvSpPr>
+          <p:cNvPr id="7" name="Shape 5"/>
+          <p:cNvSpPr/>
+          <p:nvPr/>
+        </p:nvSpPr>
+        <p:spPr>
+          <a:xfrm>
+            <a:off x="4663440" y="1600200"/>
+            <a:ext cx="3886200" cy="1417320"/>
+          </a:xfrm>
+          <a:prstGeom prst="roundRect">
+            <a:avLst>
+              <a:gd name="adj" fmla="val 5161"/>
+            </a:avLst>
+          </a:prstGeom>
+          <a:solidFill>
+            <a:srgbClr val="F3F7F6"/>
+          </a:solidFill>
+          <a:ln w="12700">
+            <a:solidFill>
+              <a:srgbClr val="F3F7F6"/>
+            </a:solidFill>
+            <a:prstDash val="solid"/>
+          </a:ln>
+        </p:spPr>
+      </p:sp>
+      <p:sp>
+        <p:nvSpPr>
+          <p:cNvPr id="8" name="Text 6"/>
+          <p:cNvSpPr txBox="1"/>
+          <p:nvPr/>
+        </p:nvSpPr>
+        <p:spPr>
+          <a:xfrm>
+            <a:off x="4846320" y="1709928"/>
+            <a:ext cx="3520440" cy="320040"/>
+          </a:xfrm>
+          <a:prstGeom prst="rect">
+            <a:avLst/>
+          </a:prstGeom>
+          <a:noFill/>
+          <a:ln/>
+        </p:spPr>
+        <p:txBody>
+          <a:bodyPr wrap="square" lIns="0" tIns="0" rIns="0" bIns="0" rtlCol="0" anchor="ctr"/>
+          <a:lstStyle/>
+          <a:p>
+            <a:pPr indent="0" marL="0">
+              <a:buNone/>
+            </a:pPr>
+            <a:r>
+              <a:rPr lang="en-US" sz="1500" b="1" dirty="0">
+                <a:solidFill>
+                  <a:srgbClr val="2A9D8F"/>
+                </a:solidFill>
+                <a:latin typeface="Calibri" pitchFamily="34" charset="0"/>
+                <a:ea typeface="Calibri" pitchFamily="34" charset="-122"/>
+                <a:cs typeface="Calibri" pitchFamily="34" charset="-120"/>
+              </a:rPr>
+              <a:t>Verification</a:t>
+            </a:r>
+            <a:endParaRPr lang="en-US" sz="1500" dirty="0"/>
+          </a:p>
+        </p:txBody>
+      </p:sp>
+      <p:sp>
+        <p:nvSpPr>
+          <p:cNvPr id="9" name="Text 7"/>
+          <p:cNvSpPr txBox="1"/>
+          <p:nvPr/>
+        </p:nvSpPr>
+        <p:spPr>
+          <a:xfrm>
+            <a:off x="4846320" y="2057400"/>
+            <a:ext cx="3520440" cy="868680"/>
+          </a:xfrm>
+          <a:prstGeom prst="rect">
+            <a:avLst/>
+          </a:prstGeom>
+          <a:noFill/>
+          <a:ln/>
+        </p:spPr>
+        <p:txBody>
+          <a:bodyPr wrap="square" lIns="0" tIns="0" rIns="0" bIns="0" rtlCol="0" anchor="ctr"/>
+          <a:lstStyle/>
+          <a:p>
+            <a:pPr indent="0" marL="0">
+              <a:buNone/>
+            </a:pPr>
+            <a:r>
+              <a:rPr lang="en-US" sz="1300" dirty="0">
+                <a:solidFill>
+                  <a:srgbClr val="5A6B7A"/>
+                </a:solidFill>
+                <a:latin typeface="Calibri" pitchFamily="34" charset="0"/>
+                <a:ea typeface="Calibri" pitchFamily="34" charset="-122"/>
+                <a:cs typeface="Calibri" pitchFamily="34" charset="-120"/>
+              </a:rPr>
+              <a:t>oracle 3/3 · nop 0, plus a 16-criterion quality rubric, novelty and red-team</a:t>
+            </a:r>
+            <a:endParaRPr lang="en-US" sz="1300" dirty="0"/>
+          </a:p>
+        </p:txBody>
+      </p:sp>
+      <p:sp>
+        <p:nvSpPr>
+          <p:cNvPr id="10" name="Shape 8"/>
+          <p:cNvSpPr/>
+          <p:nvPr/>
+        </p:nvSpPr>
+        <p:spPr>
+          <a:xfrm>
+            <a:off x="548640" y="3200400"/>
+            <a:ext cx="3886200" cy="1417320"/>
+          </a:xfrm>
+          <a:prstGeom prst="roundRect">
+            <a:avLst>
+              <a:gd name="adj" fmla="val 5161"/>
+            </a:avLst>
+          </a:prstGeom>
+          <a:solidFill>
+            <a:srgbClr val="F3F7F6"/>
+          </a:solidFill>
+          <a:ln w="12700">
+            <a:solidFill>
+              <a:srgbClr val="F3F7F6"/>
+            </a:solidFill>
+            <a:prstDash val="solid"/>
+          </a:ln>
+        </p:spPr>
+      </p:sp>
+      <p:sp>
+        <p:nvSpPr>
+          <p:cNvPr id="11" name="Text 9"/>
+          <p:cNvSpPr txBox="1"/>
+          <p:nvPr/>
+        </p:nvSpPr>
+        <p:spPr>
+          <a:xfrm>
+            <a:off x="731520" y="3310128"/>
+            <a:ext cx="3520440" cy="320040"/>
+          </a:xfrm>
+          <a:prstGeom prst="rect">
+            <a:avLst/>
+          </a:prstGeom>
+          <a:noFill/>
+          <a:ln/>
+        </p:spPr>
+        <p:txBody>
+          <a:bodyPr wrap="square" lIns="0" tIns="0" rIns="0" bIns="0" rtlCol="0" anchor="ctr"/>
+          <a:lstStyle/>
+          <a:p>
+            <a:pPr indent="0" marL="0">
+              <a:buNone/>
+            </a:pPr>
+            <a:r>
+              <a:rPr lang="en-US" sz="1500" b="1" dirty="0">
+                <a:solidFill>
+                  <a:srgbClr val="2A9D8F"/>
+                </a:solidFill>
+                <a:latin typeface="Calibri" pitchFamily="34" charset="0"/>
+                <a:ea typeface="Calibri" pitchFamily="34" charset="-122"/>
+                <a:cs typeface="Calibri" pitchFamily="34" charset="-120"/>
+              </a:rPr>
+              <a:t>Difficulty</a:t>
+            </a:r>
+            <a:endParaRPr lang="en-US" sz="1500" dirty="0"/>
+          </a:p>
+        </p:txBody>
+      </p:sp>
+      <p:sp>
+        <p:nvSpPr>
+          <p:cNvPr id="12" name="Text 10"/>
+          <p:cNvSpPr txBox="1"/>
+          <p:nvPr/>
+        </p:nvSpPr>
+        <p:spPr>
+          <a:xfrm>
+            <a:off x="731520" y="3657600"/>
+            <a:ext cx="3520440" cy="868680"/>
+          </a:xfrm>
+          <a:prstGeom prst="rect">
+            <a:avLst/>
+          </a:prstGeom>
+          <a:noFill/>
+          <a:ln/>
+        </p:spPr>
+        <p:txBody>
+          <a:bodyPr wrap="square" lIns="0" tIns="0" rIns="0" bIns="0" rtlCol="0" anchor="ctr"/>
+          <a:lstStyle/>
+          <a:p>
+            <a:pPr indent="0" marL="0">
+              <a:buNone/>
+            </a:pPr>
+            <a:r>
+              <a:rPr lang="en-US" sz="1300" dirty="0">
+                <a:solidFill>
+                  <a:srgbClr val="5A6B7A"/>
+                </a:solidFill>
+                <a:latin typeface="Calibri" pitchFamily="34" charset="0"/>
+                <a:ea typeface="Calibri" pitchFamily="34" charset="-122"/>
+                <a:cs typeface="Calibri" pitchFamily="34" charset="-120"/>
+              </a:rPr>
+              <a:t>hidden-seed inputs and multi-stage work; no stated wall-clock budgets, no answer-bearing files</a:t>
+            </a:r>
+            <a:endParaRPr lang="en-US" sz="1300" dirty="0"/>
+          </a:p>
+        </p:txBody>
+      </p:sp>
+      <p:sp>
+        <p:nvSpPr>
+          <p:cNvPr id="13" name="Shape 11"/>
+          <p:cNvSpPr/>
+          <p:nvPr/>
+        </p:nvSpPr>
+        <p:spPr>
+          <a:xfrm>
+            <a:off x="4663440" y="3200400"/>
+            <a:ext cx="3886200" cy="1417320"/>
+          </a:xfrm>
+          <a:prstGeom prst="roundRect">
+            <a:avLst>
+              <a:gd name="adj" fmla="val 5161"/>
+            </a:avLst>
+          </a:prstGeom>
+          <a:solidFill>
+            <a:srgbClr val="F3F7F6"/>
+          </a:solidFill>
+          <a:ln w="12700">
+            <a:solidFill>
+              <a:srgbClr val="F3F7F6"/>
+            </a:solidFill>
+            <a:prstDash val="solid"/>
+          </a:ln>
+        </p:spPr>
+      </p:sp>
+      <p:sp>
+        <p:nvSpPr>
+          <p:cNvPr id="14" name="Text 12"/>
+          <p:cNvSpPr txBox="1"/>
+          <p:nvPr/>
+        </p:nvSpPr>
+        <p:spPr>
+          <a:xfrm>
+            <a:off x="4846320" y="3310128"/>
+            <a:ext cx="3520440" cy="320040"/>
+          </a:xfrm>
+          <a:prstGeom prst="rect">
+            <a:avLst/>
+          </a:prstGeom>
+          <a:noFill/>
+          <a:ln/>
+        </p:spPr>
+        <p:txBody>
+          <a:bodyPr wrap="square" lIns="0" tIns="0" rIns="0" bIns="0" rtlCol="0" anchor="ctr"/>
+          <a:lstStyle/>
+          <a:p>
+            <a:pPr indent="0" marL="0">
+              <a:buNone/>
+            </a:pPr>
+            <a:r>
+              <a:rPr lang="en-US" sz="1500" b="1" dirty="0">
+                <a:solidFill>
+                  <a:srgbClr val="2A9D8F"/>
+                </a:solidFill>
+                <a:latin typeface="Calibri" pitchFamily="34" charset="0"/>
+                <a:ea typeface="Calibri" pitchFamily="34" charset="-122"/>
+                <a:cs typeface="Calibri" pitchFamily="34" charset="-120"/>
+              </a:rPr>
+              <a:t>Money</a:t>
+            </a:r>
+            <a:endParaRPr lang="en-US" sz="1500" dirty="0"/>
+          </a:p>
+        </p:txBody>
+      </p:sp>
+      <p:sp>
+        <p:nvSpPr>
+          <p:cNvPr id="15" name="Text 13"/>
+          <p:cNvSpPr txBox="1"/>
+          <p:nvPr/>
+        </p:nvSpPr>
+        <p:spPr>
+          <a:xfrm>
+            <a:off x="4846320" y="3657600"/>
+            <a:ext cx="3520440" cy="868680"/>
+          </a:xfrm>
+          <a:prstGeom prst="rect">
+            <a:avLst/>
+          </a:prstGeom>
+          <a:noFill/>
+          <a:ln/>
+        </p:spPr>
+        <p:txBody>
+          <a:bodyPr wrap="square" lIns="0" tIns="0" rIns="0" bIns="0" rtlCol="0" anchor="ctr"/>
+          <a:lstStyle/>
+          <a:p>
+            <a:pPr indent="0" marL="0">
+              <a:buNone/>
+            </a:pPr>
+            <a:r>
+              <a:rPr lang="en-US" sz="1300" dirty="0">
+                <a:solidFill>
+                  <a:srgbClr val="5A6B7A"/>
+                </a:solidFill>
+                <a:latin typeface="Calibri" pitchFamily="34" charset="0"/>
+                <a:ea typeface="Calibri" pitchFamily="34" charset="-122"/>
+                <a:cs typeface="Calibri" pitchFamily="34" charset="-120"/>
+              </a:rPr>
+              <a:t>cheap gates first; one trial ≈ $0.09, so curtailment pays for a second batch</a:t>
+            </a:r>
+            <a:endParaRPr lang="en-US" sz="1300" dirty="0"/>
+          </a:p>
+        </p:txBody>
+      </p:sp>
+    </p:spTree>
+  </p:cSld>
+  <p:clrMapOvr>
+    <a:masterClrMapping/>
+  </p:clrMapOvr>
+</p:sld>
+</file>
+
+<file path=ppt/slides/slide12.xml><?xml version="1.0" encoding="utf-8"?>
+<p:sld xmlns:a="http://schemas.openxmlformats.org/drawingml/2006/main" xmlns:r="http://schemas.openxmlformats.org/officeDocument/2006/relationships" xmlns:p="http://schemas.openxmlformats.org/presentationml/2006/main">
+  <p:cSld name="Slide 12">
+    <p:bg>
+      <p:bgPr>
+        <a:solidFill>
+          <a:srgbClr val="0F1B2A"/>
+        </a:solidFill>
+      </p:bgPr>
+    </p:bg>
+    <p:spTree>
+      <p:nvGrpSpPr>
+        <p:cNvPr id="1" name=""/>
+        <p:cNvGrpSpPr/>
+        <p:nvPr/>
+      </p:nvGrpSpPr>
+      <p:grpSpPr>
+        <a:xfrm>
+          <a:off x="0" y="0"/>
+          <a:ext cx="0" cy="0"/>
+          <a:chOff x="0" y="0"/>
+          <a:chExt cx="0" cy="0"/>
+        </a:xfrm>
+      </p:grpSpPr>
+      <p:sp>
+        <p:nvSpPr>
+          <p:cNvPr id="2" name="Text 0"/>
+          <p:cNvSpPr txBox="1"/>
+          <p:nvPr/>
+        </p:nvSpPr>
+        <p:spPr>
+          <a:xfrm>
+            <a:off x="548640" y="365760"/>
+            <a:ext cx="8046720" cy="640080"/>
+          </a:xfrm>
+          <a:prstGeom prst="rect">
+            <a:avLst/>
+          </a:prstGeom>
+          <a:noFill/>
+          <a:ln/>
+        </p:spPr>
+        <p:txBody>
+          <a:bodyPr wrap="square" lIns="0" tIns="0" rIns="0" bIns="0" rtlCol="0" anchor="ctr"/>
+          <a:lstStyle/>
+          <a:p>
+            <a:pPr indent="0" marL="0">
+              <a:buNone/>
+            </a:pPr>
+            <a:r>
+              <a:rPr lang="en-US" sz="2800" b="1" dirty="0">
+                <a:solidFill>
+                  <a:srgbClr val="FFFFFF"/>
+                </a:solidFill>
+                <a:latin typeface="Cambria" pitchFamily="34" charset="0"/>
+                <a:ea typeface="Cambria" pitchFamily="34" charset="-122"/>
+                <a:cs typeface="Cambria" pitchFamily="34" charset="-120"/>
+              </a:rPr>
+              <a:t>Q&amp;A you should be ready for</a:t>
+            </a:r>
+            <a:endParaRPr lang="en-US" sz="2800" dirty="0"/>
+          </a:p>
+        </p:txBody>
+      </p:sp>
+      <p:sp>
+        <p:nvSpPr>
+          <p:cNvPr id="3" name="Shape 1"/>
+          <p:cNvSpPr/>
+          <p:nvPr/>
+        </p:nvSpPr>
+        <p:spPr>
+          <a:xfrm>
+            <a:off x="548640" y="1097280"/>
+            <a:ext cx="3886200" cy="1645920"/>
+          </a:xfrm>
+          <a:prstGeom prst="roundRect">
+            <a:avLst>
+              <a:gd name="adj" fmla="val 4444"/>
+            </a:avLst>
+          </a:prstGeom>
+          <a:solidFill>
+            <a:srgbClr val="F3F7F6"/>
+          </a:solidFill>
+          <a:ln w="12700">
+            <a:solidFill>
+              <a:srgbClr val="F3F7F6"/>
+            </a:solidFill>
+            <a:prstDash val="solid"/>
+          </a:ln>
+        </p:spPr>
+      </p:sp>
+      <p:sp>
+        <p:nvSpPr>
+          <p:cNvPr id="4" name="Text 2"/>
+          <p:cNvSpPr txBox="1"/>
+          <p:nvPr/>
+        </p:nvSpPr>
+        <p:spPr>
+          <a:xfrm>
+            <a:off x="731520" y="1207008"/>
+            <a:ext cx="3520440" cy="457200"/>
+          </a:xfrm>
+          <a:prstGeom prst="rect">
+            <a:avLst/>
+          </a:prstGeom>
+          <a:noFill/>
+          <a:ln/>
+        </p:spPr>
+        <p:txBody>
+          <a:bodyPr wrap="square" lIns="0" tIns="0" rIns="0" bIns="0" rtlCol="0" anchor="ctr"/>
+          <a:lstStyle/>
+          <a:p>
+            <a:pPr indent="0" marL="0">
+              <a:buNone/>
+            </a:pPr>
+            <a:r>
+              <a:rPr lang="en-US" sz="1500" b="1" dirty="0">
+                <a:solidFill>
+                  <a:srgbClr val="2A9D8F"/>
+                </a:solidFill>
+                <a:latin typeface="Calibri" pitchFamily="34" charset="0"/>
+                <a:ea typeface="Calibri" pitchFamily="34" charset="-122"/>
+                <a:cs typeface="Calibri" pitchFamily="34" charset="-120"/>
+              </a:rPr>
+              <a:t>Is 1–3/5 just noise?</a:t>
+            </a:r>
+            <a:endParaRPr lang="en-US" sz="1500" dirty="0"/>
+          </a:p>
+        </p:txBody>
+      </p:sp>
+      <p:sp>
+        <p:nvSpPr>
+          <p:cNvPr id="5" name="Text 3"/>
+          <p:cNvSpPr txBox="1"/>
+          <p:nvPr/>
+        </p:nvSpPr>
+        <p:spPr>
+          <a:xfrm>
+            <a:off x="731520" y="1664208"/>
+            <a:ext cx="3520440" cy="1005840"/>
+          </a:xfrm>
+          <a:prstGeom prst="rect">
+            <a:avLst/>
+          </a:prstGeom>
+          <a:noFill/>
+          <a:ln/>
+        </p:spPr>
+        <p:txBody>
+          <a:bodyPr wrap="square" lIns="0" tIns="0" rIns="0" bIns="0" rtlCol="0" anchor="ctr"/>
+          <a:lstStyle/>
+          <a:p>
+            <a:pPr indent="0" marL="0">
+              <a:buNone/>
+            </a:pPr>
+            <a:r>
+              <a:rPr lang="en-US" sz="1250" dirty="0">
+                <a:solidFill>
+                  <a:srgbClr val="5A6B7A"/>
+                </a:solidFill>
+                <a:latin typeface="Calibri" pitchFamily="34" charset="0"/>
+                <a:ea typeface="Calibri" pitchFamily="34" charset="-122"/>
+                <a:cs typeface="Calibri" pitchFamily="34" charset="-120"/>
+              </a:rPr>
+              <a:t>A p=0.5 task lands in band 78% of the time, so verdicts are pooled: this task gives 7/10 = 0.70 across two independent batches.</a:t>
+            </a:r>
+            <a:endParaRPr lang="en-US" sz="1250" dirty="0"/>
+          </a:p>
+        </p:txBody>
+      </p:sp>
+      <p:sp>
+        <p:nvSpPr>
+          <p:cNvPr id="6" name="Shape 4"/>
+          <p:cNvSpPr/>
+          <p:nvPr/>
+        </p:nvSpPr>
+        <p:spPr>
+          <a:xfrm>
+            <a:off x="4663440" y="1097280"/>
+            <a:ext cx="3886200" cy="1645920"/>
+          </a:xfrm>
+          <a:prstGeom prst="roundRect">
+            <a:avLst>
+              <a:gd name="adj" fmla="val 4444"/>
+            </a:avLst>
+          </a:prstGeom>
+          <a:solidFill>
+            <a:srgbClr val="F3F7F6"/>
+          </a:solidFill>
+          <a:ln w="12700">
+            <a:solidFill>
+              <a:srgbClr val="F3F7F6"/>
+            </a:solidFill>
+            <a:prstDash val="solid"/>
+          </a:ln>
+        </p:spPr>
+      </p:sp>
+      <p:sp>
+        <p:nvSpPr>
+          <p:cNvPr id="7" name="Text 5"/>
+          <p:cNvSpPr txBox="1"/>
+          <p:nvPr/>
+        </p:nvSpPr>
+        <p:spPr>
+          <a:xfrm>
+            <a:off x="4846320" y="1207008"/>
+            <a:ext cx="3520440" cy="457200"/>
+          </a:xfrm>
+          <a:prstGeom prst="rect">
+            <a:avLst/>
+          </a:prstGeom>
+          <a:noFill/>
+          <a:ln/>
+        </p:spPr>
+        <p:txBody>
+          <a:bodyPr wrap="square" lIns="0" tIns="0" rIns="0" bIns="0" rtlCol="0" anchor="ctr"/>
+          <a:lstStyle/>
+          <a:p>
+            <a:pPr indent="0" marL="0">
+              <a:buNone/>
+            </a:pPr>
+            <a:r>
+              <a:rPr lang="en-US" sz="1500" b="1" dirty="0">
+                <a:solidFill>
+                  <a:srgbClr val="2A9D8F"/>
+                </a:solidFill>
+                <a:latin typeface="Calibri" pitchFamily="34" charset="0"/>
+                <a:ea typeface="Calibri" pitchFamily="34" charset="-122"/>
+                <a:cs typeface="Calibri" pitchFamily="34" charset="-120"/>
+              </a:rPr>
+              <a:t>How do you know it wasn't a hack?</a:t>
+            </a:r>
+            <a:endParaRPr lang="en-US" sz="1500" dirty="0"/>
+          </a:p>
+        </p:txBody>
+      </p:sp>
+      <p:sp>
+        <p:nvSpPr>
+          <p:cNvPr id="8" name="Text 6"/>
+          <p:cNvSpPr txBox="1"/>
+          <p:nvPr/>
+        </p:nvSpPr>
+        <p:spPr>
+          <a:xfrm>
+            <a:off x="4846320" y="1664208"/>
+            <a:ext cx="3520440" cy="1005840"/>
+          </a:xfrm>
+          <a:prstGeom prst="rect">
+            <a:avLst/>
+          </a:prstGeom>
+          <a:noFill/>
+          <a:ln/>
+        </p:spPr>
+        <p:txBody>
+          <a:bodyPr wrap="square" lIns="0" tIns="0" rIns="0" bIns="0" rtlCol="0" anchor="ctr"/>
+          <a:lstStyle/>
+          <a:p>
+            <a:pPr indent="0" marL="0">
+              <a:buNone/>
+            </a:pPr>
+            <a:r>
+              <a:rPr lang="en-US" sz="1250" dirty="0">
+                <a:solidFill>
+                  <a:srgbClr val="5A6B7A"/>
+                </a:solidFill>
+                <a:latin typeface="Calibri" pitchFamily="34" charset="0"/>
+                <a:ea typeface="Calibri" pitchFamily="34" charset="-122"/>
+                <a:cs typeface="Calibri" pitchFamily="34" charset="-120"/>
+              </a:rPr>
+              <a:t>Lint, leak scan, anti-cheating criteria, red-team and a command scan, then a pass audit that quotes the solver's own reasoning trace.</a:t>
+            </a:r>
+            <a:endParaRPr lang="en-US" sz="1250" dirty="0"/>
+          </a:p>
+        </p:txBody>
+      </p:sp>
+      <p:sp>
+        <p:nvSpPr>
+          <p:cNvPr id="9" name="Shape 7"/>
+          <p:cNvSpPr/>
+          <p:nvPr/>
+        </p:nvSpPr>
+        <p:spPr>
+          <a:xfrm>
+            <a:off x="548640" y="2926080"/>
+            <a:ext cx="3886200" cy="1645920"/>
+          </a:xfrm>
+          <a:prstGeom prst="roundRect">
+            <a:avLst>
+              <a:gd name="adj" fmla="val 4444"/>
+            </a:avLst>
+          </a:prstGeom>
+          <a:solidFill>
+            <a:srgbClr val="F3F7F6"/>
+          </a:solidFill>
+          <a:ln w="12700">
+            <a:solidFill>
+              <a:srgbClr val="F3F7F6"/>
+            </a:solidFill>
+            <a:prstDash val="solid"/>
+          </a:ln>
+        </p:spPr>
+      </p:sp>
+      <p:sp>
+        <p:nvSpPr>
+          <p:cNvPr id="10" name="Text 8"/>
+          <p:cNvSpPr txBox="1"/>
+          <p:nvPr/>
+        </p:nvSpPr>
+        <p:spPr>
+          <a:xfrm>
+            <a:off x="731520" y="3035808"/>
+            <a:ext cx="3520440" cy="457200"/>
+          </a:xfrm>
+          <a:prstGeom prst="rect">
+            <a:avLst/>
+          </a:prstGeom>
+          <a:noFill/>
+          <a:ln/>
+        </p:spPr>
+        <p:txBody>
+          <a:bodyPr wrap="square" lIns="0" tIns="0" rIns="0" bIns="0" rtlCol="0" anchor="ctr"/>
+          <a:lstStyle/>
+          <a:p>
+            <a:pPr indent="0" marL="0">
+              <a:buNone/>
+            </a:pPr>
+            <a:r>
+              <a:rPr lang="en-US" sz="1500" b="1" dirty="0">
+                <a:solidFill>
+                  <a:srgbClr val="2A9D8F"/>
+                </a:solidFill>
+                <a:latin typeface="Calibri" pitchFamily="34" charset="0"/>
+                <a:ea typeface="Calibri" pitchFamily="34" charset="-122"/>
+                <a:cs typeface="Calibri" pitchFamily="34" charset="-120"/>
+              </a:rPr>
+              <a:t>Why did four fail and one pass?</a:t>
+            </a:r>
+            <a:endParaRPr lang="en-US" sz="1500" dirty="0"/>
+          </a:p>
+        </p:txBody>
+      </p:sp>
+      <p:sp>
+        <p:nvSpPr>
+          <p:cNvPr id="11" name="Text 9"/>
+          <p:cNvSpPr txBox="1"/>
+          <p:nvPr/>
+        </p:nvSpPr>
+        <p:spPr>
+          <a:xfrm>
+            <a:off x="731520" y="3493008"/>
+            <a:ext cx="3520440" cy="1005840"/>
+          </a:xfrm>
+          <a:prstGeom prst="rect">
+            <a:avLst/>
+          </a:prstGeom>
+          <a:noFill/>
+          <a:ln/>
+        </p:spPr>
+        <p:txBody>
+          <a:bodyPr wrap="square" lIns="0" tIns="0" rIns="0" bIns="0" rtlCol="0" anchor="ctr"/>
+          <a:lstStyle/>
+          <a:p>
+            <a:pPr indent="0" marL="0">
+              <a:buNone/>
+            </a:pPr>
+            <a:r>
+              <a:rPr lang="en-US" sz="1250" dirty="0">
+                <a:solidFill>
+                  <a:srgbClr val="5A6B7A"/>
+                </a:solidFill>
+                <a:latin typeface="Calibri" pitchFamily="34" charset="0"/>
+                <a:ea typeface="Calibri" pitchFamily="34" charset="-122"/>
+                <a:cs typeface="Calibri" pitchFamily="34" charset="-120"/>
+              </a:rPr>
+              <a:t>The pool is bimodal. The main lever that produced in-band results was also the one the rubric rejects.</a:t>
+            </a:r>
+            <a:endParaRPr lang="en-US" sz="1250" dirty="0"/>
+          </a:p>
+        </p:txBody>
+      </p:sp>
+      <p:sp>
+        <p:nvSpPr>
+          <p:cNvPr id="12" name="Shape 10"/>
+          <p:cNvSpPr/>
+          <p:nvPr/>
+        </p:nvSpPr>
+        <p:spPr>
+          <a:xfrm>
+            <a:off x="4663440" y="2926080"/>
+            <a:ext cx="3886200" cy="1645920"/>
+          </a:xfrm>
+          <a:prstGeom prst="roundRect">
+            <a:avLst>
+              <a:gd name="adj" fmla="val 4444"/>
+            </a:avLst>
+          </a:prstGeom>
+          <a:solidFill>
+            <a:srgbClr val="F3F7F6"/>
+          </a:solidFill>
+          <a:ln w="12700">
+            <a:solidFill>
+              <a:srgbClr val="F3F7F6"/>
+            </a:solidFill>
+            <a:prstDash val="solid"/>
+          </a:ln>
+        </p:spPr>
+      </p:sp>
+      <p:sp>
+        <p:nvSpPr>
+          <p:cNvPr id="13" name="Text 11"/>
+          <p:cNvSpPr txBox="1"/>
+          <p:nvPr/>
+        </p:nvSpPr>
+        <p:spPr>
+          <a:xfrm>
+            <a:off x="4846320" y="3035808"/>
+            <a:ext cx="3520440" cy="457200"/>
+          </a:xfrm>
+          <a:prstGeom prst="rect">
+            <a:avLst/>
+          </a:prstGeom>
+          <a:noFill/>
+          <a:ln/>
+        </p:spPr>
+        <p:txBody>
+          <a:bodyPr wrap="square" lIns="0" tIns="0" rIns="0" bIns="0" rtlCol="0" anchor="ctr"/>
+          <a:lstStyle/>
+          <a:p>
+            <a:pPr indent="0" marL="0">
+              <a:buNone/>
+            </a:pPr>
+            <a:r>
+              <a:rPr lang="en-US" sz="1500" b="1" dirty="0">
+                <a:solidFill>
+                  <a:srgbClr val="2A9D8F"/>
+                </a:solidFill>
+                <a:latin typeface="Calibri" pitchFamily="34" charset="0"/>
+                <a:ea typeface="Calibri" pitchFamily="34" charset="-122"/>
+                <a:cs typeface="Calibri" pitchFamily="34" charset="-120"/>
+              </a:rPr>
+              <a:t>Would a stronger author help?</a:t>
+            </a:r>
+            <a:endParaRPr lang="en-US" sz="1500" dirty="0"/>
+          </a:p>
+        </p:txBody>
+      </p:sp>
+      <p:sp>
+        <p:nvSpPr>
+          <p:cNvPr id="14" name="Text 12"/>
+          <p:cNvSpPr txBox="1"/>
+          <p:nvPr/>
+        </p:nvSpPr>
+        <p:spPr>
+          <a:xfrm>
+            <a:off x="4846320" y="3493008"/>
+            <a:ext cx="3520440" cy="1005840"/>
+          </a:xfrm>
+          <a:prstGeom prst="rect">
+            <a:avLst/>
+          </a:prstGeom>
+          <a:noFill/>
+          <a:ln/>
+        </p:spPr>
+        <p:txBody>
+          <a:bodyPr wrap="square" lIns="0" tIns="0" rIns="0" bIns="0" rtlCol="0" anchor="ctr"/>
+          <a:lstStyle/>
+          <a:p>
+            <a:pPr indent="0" marL="0">
+              <a:buNone/>
+            </a:pPr>
+            <a:r>
+              <a:rPr lang="en-US" sz="1250" dirty="0">
+                <a:solidFill>
+                  <a:srgbClr val="5A6B7A"/>
+                </a:solidFill>
+                <a:latin typeface="Calibri" pitchFamily="34" charset="0"/>
+                <a:ea typeface="Calibri" pitchFamily="34" charset="-122"/>
+                <a:cs typeface="Calibri" pitchFamily="34" charset="-120"/>
+              </a:rPr>
+              <a:t>A 2×2 study produced no in-band task at all: the weak author wrote 0 valid tasks of 7, and no cell cleared.</a:t>
+            </a:r>
+            <a:endParaRPr lang="en-US" sz="1250" dirty="0"/>
+          </a:p>
+        </p:txBody>
+      </p:sp>
+    </p:spTree>
+  </p:cSld>
+  <p:clrMapOvr>
+    <a:masterClrMapping/>
+  </p:clrMapOvr>
+</p:sld>
+</file>
+
 <file path=ppt/slides/slide2.xml><?xml version="1.0" encoding="utf-8"?>
 <p:sld xmlns:a="http://schemas.openxmlformats.org/drawingml/2006/main" xmlns:r="http://schemas.openxmlformats.org/officeDocument/2006/relationships" xmlns:p="http://schemas.openxmlformats.org/presentationml/2006/main">
   <p:cSld name="Slide 2">
@@ -4797,12 +6163,12 @@
         </p:nvSpPr>
         <p:spPr>
           <a:xfrm>
-            <a:off x="5532120" y="1143000"/>
-            <a:ext cx="3154680" cy="960120"/>
+            <a:off x="5532120" y="1097280"/>
+            <a:ext cx="3154680" cy="786384"/>
           </a:xfrm>
           <a:prstGeom prst="roundRect">
             <a:avLst>
-              <a:gd name="adj" fmla="val 7619"/>
+              <a:gd name="adj" fmla="val 9302"/>
             </a:avLst>
           </a:prstGeom>
           <a:solidFill>
@@ -4824,8 +6190,8 @@
         </p:nvSpPr>
         <p:spPr>
           <a:xfrm>
-            <a:off x="5669280" y="1216152"/>
-            <a:ext cx="2880360" cy="457200"/>
+            <a:off x="5669280" y="1152144"/>
+            <a:ext cx="2880360" cy="384048"/>
           </a:xfrm>
           <a:prstGeom prst="rect">
             <a:avLst/>
@@ -4841,7 +6207,7 @@
               <a:buNone/>
             </a:pPr>
             <a:r>
-              <a:rPr lang="en-US" sz="2200" b="1" dirty="0">
+              <a:rPr lang="en-US" sz="1900" b="1" dirty="0">
                 <a:solidFill>
                   <a:srgbClr val="2A9D8F"/>
                 </a:solidFill>
@@ -4849,9 +6215,9 @@
                 <a:ea typeface="Cambria" pitchFamily="34" charset="-122"/>
                 <a:cs typeface="Cambria" pitchFamily="34" charset="-120"/>
               </a:rPr>
-              <a:t>22</a:t>
-            </a:r>
-            <a:endParaRPr lang="en-US" sz="2200" dirty="0"/>
+              <a:t>17 / 22</a:t>
+            </a:r>
+            <a:endParaRPr lang="en-US" sz="1900" dirty="0"/>
           </a:p>
         </p:txBody>
       </p:sp>
@@ -4863,8 +6229,8 @@
         </p:nvSpPr>
         <p:spPr>
           <a:xfrm>
-            <a:off x="5669280" y="1645920"/>
-            <a:ext cx="2880360" cy="320040"/>
+            <a:off x="5669280" y="1527048"/>
+            <a:ext cx="2880360" cy="292608"/>
           </a:xfrm>
           <a:prstGeom prst="rect">
             <a:avLst/>
@@ -4880,7 +6246,7 @@
               <a:buNone/>
             </a:pPr>
             <a:r>
-              <a:rPr lang="en-US" sz="1300" dirty="0">
+              <a:rPr lang="en-US" sz="1200" dirty="0">
                 <a:solidFill>
                   <a:srgbClr val="5A6B7A"/>
                 </a:solidFill>
@@ -4888,9 +6254,9 @@
                 <a:ea typeface="Calibri" pitchFamily="34" charset="-122"/>
                 <a:cs typeface="Calibri" pitchFamily="34" charset="-120"/>
               </a:rPr>
-              <a:t>candidate records</a:t>
-            </a:r>
-            <a:endParaRPr lang="en-US" sz="1300" dirty="0"/>
+              <a:t>verdicts / candidate records</a:t>
+            </a:r>
+            <a:endParaRPr lang="en-US" sz="1200" dirty="0"/>
           </a:p>
         </p:txBody>
       </p:sp>
@@ -4902,12 +6268,12 @@
         </p:nvSpPr>
         <p:spPr>
           <a:xfrm>
-            <a:off x="5532120" y="2240280"/>
-            <a:ext cx="3154680" cy="960120"/>
+            <a:off x="5532120" y="1965960"/>
+            <a:ext cx="3154680" cy="786384"/>
           </a:xfrm>
           <a:prstGeom prst="roundRect">
             <a:avLst>
-              <a:gd name="adj" fmla="val 7619"/>
+              <a:gd name="adj" fmla="val 9302"/>
             </a:avLst>
           </a:prstGeom>
           <a:solidFill>
@@ -4929,8 +6295,8 @@
         </p:nvSpPr>
         <p:spPr>
           <a:xfrm>
-            <a:off x="5669280" y="2313432"/>
-            <a:ext cx="2880360" cy="457200"/>
+            <a:off x="5669280" y="2020824"/>
+            <a:ext cx="2880360" cy="384048"/>
           </a:xfrm>
           <a:prstGeom prst="rect">
             <a:avLst/>
@@ -4946,7 +6312,7 @@
               <a:buNone/>
             </a:pPr>
             <a:r>
-              <a:rPr lang="en-US" sz="2200" b="1" dirty="0">
+              <a:rPr lang="en-US" sz="1900" b="1" dirty="0">
                 <a:solidFill>
                   <a:srgbClr val="2A9D8F"/>
                 </a:solidFill>
@@ -4956,7 +6322,7 @@
               </a:rPr>
               <a:t>12 / 10</a:t>
             </a:r>
-            <a:endParaRPr lang="en-US" sz="2200" dirty="0"/>
+            <a:endParaRPr lang="en-US" sz="1900" dirty="0"/>
           </a:p>
         </p:txBody>
       </p:sp>
@@ -4968,8 +6334,8 @@
         </p:nvSpPr>
         <p:spPr>
           <a:xfrm>
-            <a:off x="5669280" y="2743200"/>
-            <a:ext cx="2880360" cy="320040"/>
+            <a:off x="5669280" y="2395728"/>
+            <a:ext cx="2880360" cy="292608"/>
           </a:xfrm>
           <a:prstGeom prst="rect">
             <a:avLst/>
@@ -4985,7 +6351,7 @@
               <a:buNone/>
             </a:pPr>
             <a:r>
-              <a:rPr lang="en-US" sz="1300" dirty="0">
+              <a:rPr lang="en-US" sz="1200" dirty="0">
                 <a:solidFill>
                   <a:srgbClr val="5A6B7A"/>
                 </a:solidFill>
@@ -4995,7 +6361,7 @@
               </a:rPr>
               <a:t>fresh / reused</a:t>
             </a:r>
-            <a:endParaRPr lang="en-US" sz="1300" dirty="0"/>
+            <a:endParaRPr lang="en-US" sz="1200" dirty="0"/>
           </a:p>
         </p:txBody>
       </p:sp>
@@ -5007,12 +6373,12 @@
         </p:nvSpPr>
         <p:spPr>
           <a:xfrm>
-            <a:off x="5532120" y="3337560"/>
-            <a:ext cx="3154680" cy="960120"/>
+            <a:off x="5532120" y="2834640"/>
+            <a:ext cx="3154680" cy="786384"/>
           </a:xfrm>
           <a:prstGeom prst="roundRect">
             <a:avLst>
-              <a:gd name="adj" fmla="val 7619"/>
+              <a:gd name="adj" fmla="val 9302"/>
             </a:avLst>
           </a:prstGeom>
           <a:solidFill>
@@ -5034,8 +6400,8 @@
         </p:nvSpPr>
         <p:spPr>
           <a:xfrm>
-            <a:off x="5669280" y="3410712"/>
-            <a:ext cx="2880360" cy="457200"/>
+            <a:off x="5669280" y="2889504"/>
+            <a:ext cx="2880360" cy="384048"/>
           </a:xfrm>
           <a:prstGeom prst="rect">
             <a:avLst/>
@@ -5051,7 +6417,7 @@
               <a:buNone/>
             </a:pPr>
             <a:r>
-              <a:rPr lang="en-US" sz="2200" b="1" dirty="0">
+              <a:rPr lang="en-US" sz="1900" b="1" dirty="0">
                 <a:solidFill>
                   <a:srgbClr val="2A9D8F"/>
                 </a:solidFill>
@@ -5059,9 +6425,9 @@
                 <a:ea typeface="Cambria" pitchFamily="34" charset="-122"/>
                 <a:cs typeface="Cambria" pitchFamily="34" charset="-120"/>
               </a:rPr>
-              <a:t>1</a:t>
-            </a:r>
-            <a:endParaRPr lang="en-US" sz="2200" dirty="0"/>
+              <a:t>2</a:t>
+            </a:r>
+            <a:endParaRPr lang="en-US" sz="1900" dirty="0"/>
           </a:p>
         </p:txBody>
       </p:sp>
@@ -5073,8 +6439,8 @@
         </p:nvSpPr>
         <p:spPr>
           <a:xfrm>
-            <a:off x="5669280" y="3840480"/>
-            <a:ext cx="2880360" cy="320040"/>
+            <a:off x="5669280" y="3264408"/>
+            <a:ext cx="2880360" cy="292608"/>
           </a:xfrm>
           <a:prstGeom prst="rect">
             <a:avLst/>
@@ -5090,7 +6456,7 @@
               <a:buNone/>
             </a:pPr>
             <a:r>
-              <a:rPr lang="en-US" sz="1300" dirty="0">
+              <a:rPr lang="en-US" sz="1200" dirty="0">
                 <a:solidFill>
                   <a:srgbClr val="5A6B7A"/>
                 </a:solidFill>
@@ -5098,9 +6464,114 @@
                 <a:ea typeface="Calibri" pitchFamily="34" charset="-122"/>
                 <a:cs typeface="Calibri" pitchFamily="34" charset="-120"/>
               </a:rPr>
+              <a:t>in band, full 5-attempt record</a:t>
+            </a:r>
+            <a:endParaRPr lang="en-US" sz="1200" dirty="0"/>
+          </a:p>
+        </p:txBody>
+      </p:sp>
+      <p:sp>
+        <p:nvSpPr>
+          <p:cNvPr id="13" name="Shape 10"/>
+          <p:cNvSpPr/>
+          <p:nvPr/>
+        </p:nvSpPr>
+        <p:spPr>
+          <a:xfrm>
+            <a:off x="5532120" y="3703320"/>
+            <a:ext cx="3154680" cy="786384"/>
+          </a:xfrm>
+          <a:prstGeom prst="roundRect">
+            <a:avLst>
+              <a:gd name="adj" fmla="val 9302"/>
+            </a:avLst>
+          </a:prstGeom>
+          <a:solidFill>
+            <a:srgbClr val="F3F7F6"/>
+          </a:solidFill>
+          <a:ln w="12700">
+            <a:solidFill>
+              <a:srgbClr val="F3F7F6"/>
+            </a:solidFill>
+            <a:prstDash val="solid"/>
+          </a:ln>
+        </p:spPr>
+      </p:sp>
+      <p:sp>
+        <p:nvSpPr>
+          <p:cNvPr id="14" name="Text 11"/>
+          <p:cNvSpPr txBox="1"/>
+          <p:nvPr/>
+        </p:nvSpPr>
+        <p:spPr>
+          <a:xfrm>
+            <a:off x="5669280" y="3758184"/>
+            <a:ext cx="2880360" cy="384048"/>
+          </a:xfrm>
+          <a:prstGeom prst="rect">
+            <a:avLst/>
+          </a:prstGeom>
+          <a:noFill/>
+          <a:ln/>
+        </p:spPr>
+        <p:txBody>
+          <a:bodyPr wrap="square" lIns="0" tIns="0" rIns="0" bIns="0" rtlCol="0" anchor="ctr"/>
+          <a:lstStyle/>
+          <a:p>
+            <a:pPr indent="0" marL="0">
+              <a:buNone/>
+            </a:pPr>
+            <a:r>
+              <a:rPr lang="en-US" sz="1900" b="1" dirty="0">
+                <a:solidFill>
+                  <a:srgbClr val="2A9D8F"/>
+                </a:solidFill>
+                <a:latin typeface="Cambria" pitchFamily="34" charset="0"/>
+                <a:ea typeface="Cambria" pitchFamily="34" charset="-122"/>
+                <a:cs typeface="Cambria" pitchFamily="34" charset="-120"/>
+              </a:rPr>
+              <a:t>1</a:t>
+            </a:r>
+            <a:endParaRPr lang="en-US" sz="1900" dirty="0"/>
+          </a:p>
+        </p:txBody>
+      </p:sp>
+      <p:sp>
+        <p:nvSpPr>
+          <p:cNvPr id="15" name="Text 12"/>
+          <p:cNvSpPr txBox="1"/>
+          <p:nvPr/>
+        </p:nvSpPr>
+        <p:spPr>
+          <a:xfrm>
+            <a:off x="5669280" y="4133088"/>
+            <a:ext cx="2880360" cy="292608"/>
+          </a:xfrm>
+          <a:prstGeom prst="rect">
+            <a:avLst/>
+          </a:prstGeom>
+          <a:noFill/>
+          <a:ln/>
+        </p:spPr>
+        <p:txBody>
+          <a:bodyPr wrap="square" lIns="0" tIns="0" rIns="0" bIns="0" rtlCol="0" anchor="ctr"/>
+          <a:lstStyle/>
+          <a:p>
+            <a:pPr indent="0" marL="0">
+              <a:buNone/>
+            </a:pPr>
+            <a:r>
+              <a:rPr lang="en-US" sz="1200" dirty="0">
+                <a:solidFill>
+                  <a:srgbClr val="5A6B7A"/>
+                </a:solidFill>
+                <a:latin typeface="Calibri" pitchFamily="34" charset="0"/>
+                <a:ea typeface="Calibri" pitchFamily="34" charset="-122"/>
+                <a:cs typeface="Calibri" pitchFamily="34" charset="-120"/>
+              </a:rPr>
               <a:t>approved after audit</a:t>
             </a:r>
-            <a:endParaRPr lang="en-US" sz="1300" dirty="0"/>
+            <a:endParaRPr lang="en-US" sz="1200" dirty="0"/>
           </a:p>
         </p:txBody>
       </p:sp>

--- a/docs/result/presentation.pptx
+++ b/docs/result/presentation.pptx
@@ -8965,7 +8965,7 @@
                 <a:ea typeface="Cambria" pitchFamily="34" charset="-122"/>
                 <a:cs typeface="Cambria" pitchFamily="34" charset="-120"/>
               </a:rPr>
-              <a:t>$16.5</a:t>
+              <a:t>$12.5</a:t>
             </a:r>
             <a:endParaRPr lang="en-US" sz="3600" dirty="0"/>
           </a:p>

--- a/docs/result/presentation.pptx
+++ b/docs/result/presentation.pptx
@@ -8186,7 +8186,7 @@
                 <a:ea typeface="Calibri" pitchFamily="34" charset="-122"/>
                 <a:cs typeface="Calibri" pitchFamily="34" charset="-120"/>
               </a:rPr>
-              <a:t>~$3.79 vs naive 5×. Invalid-run early stops credited with nothing.</a:t>
+              <a:t>~$3.78 vs naive 5×. Invalid-run early stops credited with nothing.</a:t>
             </a:r>
             <a:endParaRPr lang="en-US" sz="1300" dirty="0"/>
           </a:p>
